--- a/rapports/septembre/SNCF_sept2026.pptx
+++ b/rapports/septembre/SNCF_sept2026.pptx
@@ -6007,7 +6007,7 @@
         <p:spPr>
           <a:xfrm>
             <a:off x="8296656" y="4389120"/>
-            <a:ext cx="2072640" cy="152400"/>
+            <a:ext cx="2225040" cy="152400"/>
           </a:xfrm>
           <a:prstGeom prst="rect">
             <a:avLst/>
@@ -6086,7 +6086,7 @@
         <p:spPr>
           <a:xfrm>
             <a:off x="8296656" y="4657344"/>
-            <a:ext cx="2072640" cy="152400"/>
+            <a:ext cx="2225040" cy="152400"/>
           </a:xfrm>
           <a:prstGeom prst="rect">
             <a:avLst/>
@@ -6165,7 +6165,7 @@
         <p:spPr>
           <a:xfrm>
             <a:off x="8296656" y="4925568"/>
-            <a:ext cx="2072640" cy="152400"/>
+            <a:ext cx="2225040" cy="152400"/>
           </a:xfrm>
           <a:prstGeom prst="rect">
             <a:avLst/>
@@ -6244,7 +6244,7 @@
         <p:spPr>
           <a:xfrm>
             <a:off x="8296656" y="5193792"/>
-            <a:ext cx="2072640" cy="152400"/>
+            <a:ext cx="2225040" cy="152400"/>
           </a:xfrm>
           <a:prstGeom prst="rect">
             <a:avLst/>
@@ -6323,7 +6323,7 @@
         <p:spPr>
           <a:xfrm>
             <a:off x="8296656" y="5462016"/>
-            <a:ext cx="2072640" cy="152400"/>
+            <a:ext cx="2225040" cy="152400"/>
           </a:xfrm>
           <a:prstGeom prst="rect">
             <a:avLst/>
@@ -6402,7 +6402,7 @@
         <p:spPr>
           <a:xfrm>
             <a:off x="8296656" y="5730240"/>
-            <a:ext cx="2072640" cy="152400"/>
+            <a:ext cx="2225040" cy="152400"/>
           </a:xfrm>
           <a:prstGeom prst="rect">
             <a:avLst/>

--- a/rapports/septembre/SNCF_sept2026.pptx
+++ b/rapports/septembre/SNCF_sept2026.pptx
@@ -5879,7 +5879,7 @@
                 </a:solidFill>
                 <a:latin typeface="Arial"/>
               </a:rPr>
-              <a:t>MARQUES CITÉES</a:t>
+              <a:t>CATÉGORIES DE PRODUITS</a:t>
             </a:r>
           </a:p>
         </p:txBody>
@@ -5914,7 +5914,7 @@
                 </a:solidFill>
                 <a:latin typeface="Arial"/>
               </a:rPr>
-              <a:t>Part de voix dans les messages utilisateurs</a:t>
+              <a:t>Répartition des requêtes</a:t>
             </a:r>
           </a:p>
         </p:txBody>
@@ -6028,7 +6028,7 @@
                 </a:solidFill>
                 <a:latin typeface="Arial"/>
               </a:rPr>
-              <a:t>SNCF</a:t>
+              <a:t>Réservation de billets de train</a:t>
             </a:r>
           </a:p>
         </p:txBody>
@@ -6107,7 +6107,7 @@
                 </a:solidFill>
                 <a:latin typeface="Arial"/>
               </a:rPr>
-              <a:t>easyJet · 7 %</a:t>
+              <a:t>Prix et petits prix · 20 %</a:t>
             </a:r>
           </a:p>
         </p:txBody>
@@ -6180,13 +6180,13 @@
           <a:p>
             <a:pPr algn="l"/>
             <a:r>
-              <a:rPr sz="1000" b="0" i="0">
+              <a:rPr sz="800" b="0" i="0">
                 <a:solidFill>
                   <a:srgbClr val="111111"/>
                 </a:solidFill>
                 <a:latin typeface="Arial"/>
               </a:rPr>
-              <a:t>Ryanair · 7 %</a:t>
+              <a:t>Destinations et itinéraires · 16 %</a:t>
             </a:r>
           </a:p>
         </p:txBody>
@@ -6265,7 +6265,7 @@
                 </a:solidFill>
                 <a:latin typeface="Arial"/>
               </a:rPr>
-              <a:t>Air France · 6 %</a:t>
+              <a:t>Cartes et abonnements · 12 %</a:t>
             </a:r>
           </a:p>
         </p:txBody>
@@ -6338,13 +6338,13 @@
           <a:p>
             <a:pPr algn="l"/>
             <a:r>
-              <a:rPr sz="1000" b="0" i="0">
+              <a:rPr sz="800" b="0" i="0">
                 <a:solidFill>
                   <a:srgbClr val="111111"/>
                 </a:solidFill>
                 <a:latin typeface="Arial"/>
               </a:rPr>
-              <a:t>FlixBus · 6 %</a:t>
+              <a:t>Trains de nuit et international · 8 %</a:t>
             </a:r>
           </a:p>
         </p:txBody>
@@ -6423,7 +6423,7 @@
                 </a:solidFill>
                 <a:latin typeface="Arial"/>
               </a:rPr>
-              <a:t>Autres · 18 %</a:t>
+              <a:t>Bagages et services à bord · 4 %</a:t>
             </a:r>
           </a:p>
         </p:txBody>
@@ -6437,7 +6437,7 @@
         <p:spPr>
           <a:xfrm>
             <a:off x="10564368" y="4450080"/>
-            <a:ext cx="475488" cy="751027"/>
+            <a:ext cx="475488" cy="536448"/>
           </a:xfrm>
           <a:prstGeom prst="rect">
             <a:avLst/>
@@ -6481,7 +6481,7 @@
         <p:spPr>
           <a:xfrm>
             <a:off x="10564368" y="4450080"/>
-            <a:ext cx="475488" cy="751027"/>
+            <a:ext cx="475488" cy="536448"/>
           </a:xfrm>
           <a:prstGeom prst="rect">
             <a:avLst/>
@@ -6502,7 +6502,7 @@
                 </a:solidFill>
                 <a:latin typeface="Arial"/>
               </a:rPr>
-              <a:t>56 %</a:t>
+              <a:t>40 %</a:t>
             </a:r>
           </a:p>
         </p:txBody>
@@ -6515,8 +6515,8 @@
         </p:nvSpPr>
         <p:spPr>
           <a:xfrm>
-            <a:off x="10564368" y="5201107"/>
-            <a:ext cx="475488" cy="93878"/>
+            <a:off x="10564368" y="4986528"/>
+            <a:ext cx="475488" cy="268224"/>
           </a:xfrm>
           <a:prstGeom prst="rect">
             <a:avLst/>
@@ -6559,8 +6559,8 @@
         </p:nvSpPr>
         <p:spPr>
           <a:xfrm>
-            <a:off x="10564368" y="5294985"/>
-            <a:ext cx="475488" cy="93878"/>
+            <a:off x="10564368" y="5254752"/>
+            <a:ext cx="475488" cy="214579"/>
           </a:xfrm>
           <a:prstGeom prst="rect">
             <a:avLst/>
@@ -6603,8 +6603,8 @@
         </p:nvSpPr>
         <p:spPr>
           <a:xfrm>
-            <a:off x="10564368" y="5388864"/>
-            <a:ext cx="475488" cy="80467"/>
+            <a:off x="10564368" y="5469331"/>
+            <a:ext cx="475488" cy="160934"/>
           </a:xfrm>
           <a:prstGeom prst="rect">
             <a:avLst/>
@@ -6647,8 +6647,8 @@
         </p:nvSpPr>
         <p:spPr>
           <a:xfrm>
-            <a:off x="10564368" y="5469331"/>
-            <a:ext cx="475488" cy="80467"/>
+            <a:off x="10564368" y="5630265"/>
+            <a:ext cx="475488" cy="107289"/>
           </a:xfrm>
           <a:prstGeom prst="rect">
             <a:avLst/>
@@ -6691,8 +6691,8 @@
         </p:nvSpPr>
         <p:spPr>
           <a:xfrm>
-            <a:off x="10564368" y="5549798"/>
-            <a:ext cx="475488" cy="241401"/>
+            <a:off x="10564368" y="5737555"/>
+            <a:ext cx="475488" cy="53644"/>
           </a:xfrm>
           <a:prstGeom prst="rect">
             <a:avLst/>

--- a/rapports/septembre/SNCF_sept2026.pptx
+++ b/rapports/septembre/SNCF_sept2026.pptx
@@ -6028,7 +6028,7 @@
                 </a:solidFill>
                 <a:latin typeface="Arial"/>
               </a:rPr>
-              <a:t>Réservation de billets de train</a:t>
+              <a:t>Paris – Rennes · 23 %</a:t>
             </a:r>
           </a:p>
         </p:txBody>
@@ -6101,13 +6101,13 @@
           <a:p>
             <a:pPr algn="l"/>
             <a:r>
-              <a:rPr sz="1000" b="0" i="0">
+              <a:rPr sz="800" b="0" i="0">
                 <a:solidFill>
                   <a:srgbClr val="111111"/>
                 </a:solidFill>
                 <a:latin typeface="Arial"/>
               </a:rPr>
-              <a:t>Prix et petits prix · 20 %</a:t>
+              <a:t>Paris – Lyon / Marseille / Nice · 23 %</a:t>
             </a:r>
           </a:p>
         </p:txBody>
@@ -6186,7 +6186,7 @@
                 </a:solidFill>
                 <a:latin typeface="Arial"/>
               </a:rPr>
-              <a:t>Destinations et itinéraires · 16 %</a:t>
+              <a:t>Paris – Bordeaux / Toulouse · 17 %</a:t>
             </a:r>
           </a:p>
         </p:txBody>
@@ -6259,13 +6259,13 @@
           <a:p>
             <a:pPr algn="l"/>
             <a:r>
-              <a:rPr sz="1000" b="0" i="0">
+              <a:rPr sz="800" b="0" i="0">
                 <a:solidFill>
                   <a:srgbClr val="111111"/>
                 </a:solidFill>
                 <a:latin typeface="Arial"/>
               </a:rPr>
-              <a:t>Cartes et abonnements · 12 %</a:t>
+              <a:t>Paris – Nantes / Lille / Strasbourg · 21 %</a:t>
             </a:r>
           </a:p>
         </p:txBody>
@@ -6344,7 +6344,7 @@
                 </a:solidFill>
                 <a:latin typeface="Arial"/>
               </a:rPr>
-              <a:t>Trains de nuit et international · 8 %</a:t>
+              <a:t>International (Amsterdam, Barcelone) · 9 %</a:t>
             </a:r>
           </a:p>
         </p:txBody>
@@ -6423,7 +6423,7 @@
                 </a:solidFill>
                 <a:latin typeface="Arial"/>
               </a:rPr>
-              <a:t>Bagages et services à bord · 4 %</a:t>
+              <a:t>Autres liaisons · 7 %</a:t>
             </a:r>
           </a:p>
         </p:txBody>
@@ -6437,7 +6437,7 @@
         <p:spPr>
           <a:xfrm>
             <a:off x="10564368" y="4450080"/>
-            <a:ext cx="475488" cy="536448"/>
+            <a:ext cx="475488" cy="308457"/>
           </a:xfrm>
           <a:prstGeom prst="rect">
             <a:avLst/>
@@ -6474,49 +6474,14 @@
       </p:sp>
       <p:sp>
         <p:nvSpPr>
-          <p:cNvPr id="87" name="TextBox 86"/>
-          <p:cNvSpPr txBox="1"/>
-          <p:nvPr/>
-        </p:nvSpPr>
-        <p:spPr>
-          <a:xfrm>
-            <a:off x="10564368" y="4450080"/>
-            <a:ext cx="475488" cy="536448"/>
-          </a:xfrm>
-          <a:prstGeom prst="rect">
-            <a:avLst/>
-          </a:prstGeom>
-          <a:noFill/>
-        </p:spPr>
-        <p:txBody>
-          <a:bodyPr wrap="square" anchor="ctr" lIns="0" rIns="0" tIns="0" bIns="0">
-            <a:spAutoFit/>
-          </a:bodyPr>
-          <a:lstStyle/>
-          <a:p>
-            <a:pPr algn="ctr"/>
-            <a:r>
-              <a:rPr sz="1000" b="1" i="0">
-                <a:solidFill>
-                  <a:srgbClr val="FFFFFF"/>
-                </a:solidFill>
-                <a:latin typeface="Arial"/>
-              </a:rPr>
-              <a:t>40 %</a:t>
-            </a:r>
-          </a:p>
-        </p:txBody>
-      </p:sp>
-      <p:sp>
-        <p:nvSpPr>
-          <p:cNvPr id="88" name="Rectangle 87"/>
+          <p:cNvPr id="87" name="Rectangle 86"/>
           <p:cNvSpPr/>
           <p:nvPr/>
         </p:nvSpPr>
         <p:spPr>
           <a:xfrm>
-            <a:off x="10564368" y="4986528"/>
-            <a:ext cx="475488" cy="268224"/>
+            <a:off x="10564368" y="4758537"/>
+            <a:ext cx="475488" cy="308457"/>
           </a:xfrm>
           <a:prstGeom prst="rect">
             <a:avLst/>
@@ -6553,14 +6518,14 @@
       </p:sp>
       <p:sp>
         <p:nvSpPr>
-          <p:cNvPr id="89" name="Rectangle 88"/>
+          <p:cNvPr id="88" name="Rectangle 87"/>
           <p:cNvSpPr/>
           <p:nvPr/>
         </p:nvSpPr>
         <p:spPr>
           <a:xfrm>
-            <a:off x="10564368" y="5254752"/>
-            <a:ext cx="475488" cy="214579"/>
+            <a:off x="10564368" y="5066995"/>
+            <a:ext cx="475488" cy="227990"/>
           </a:xfrm>
           <a:prstGeom prst="rect">
             <a:avLst/>
@@ -6597,14 +6562,14 @@
       </p:sp>
       <p:sp>
         <p:nvSpPr>
-          <p:cNvPr id="90" name="Rectangle 89"/>
+          <p:cNvPr id="89" name="Rectangle 88"/>
           <p:cNvSpPr/>
           <p:nvPr/>
         </p:nvSpPr>
         <p:spPr>
           <a:xfrm>
-            <a:off x="10564368" y="5469331"/>
-            <a:ext cx="475488" cy="160934"/>
+            <a:off x="10564368" y="5294985"/>
+            <a:ext cx="475488" cy="281635"/>
           </a:xfrm>
           <a:prstGeom prst="rect">
             <a:avLst/>
@@ -6641,14 +6606,14 @@
       </p:sp>
       <p:sp>
         <p:nvSpPr>
-          <p:cNvPr id="91" name="Rectangle 90"/>
+          <p:cNvPr id="90" name="Rectangle 89"/>
           <p:cNvSpPr/>
           <p:nvPr/>
         </p:nvSpPr>
         <p:spPr>
           <a:xfrm>
-            <a:off x="10564368" y="5630265"/>
-            <a:ext cx="475488" cy="107289"/>
+            <a:off x="10564368" y="5576620"/>
+            <a:ext cx="475488" cy="120700"/>
           </a:xfrm>
           <a:prstGeom prst="rect">
             <a:avLst/>
@@ -6685,14 +6650,14 @@
       </p:sp>
       <p:sp>
         <p:nvSpPr>
-          <p:cNvPr id="92" name="Rectangle 91"/>
+          <p:cNvPr id="91" name="Rectangle 90"/>
           <p:cNvSpPr/>
           <p:nvPr/>
         </p:nvSpPr>
         <p:spPr>
           <a:xfrm>
-            <a:off x="10564368" y="5737555"/>
-            <a:ext cx="475488" cy="53644"/>
+            <a:off x="10564368" y="5697321"/>
+            <a:ext cx="475488" cy="93878"/>
           </a:xfrm>
           <a:prstGeom prst="rect">
             <a:avLst/>
@@ -7128,7 +7093,7 @@
                 </a:solidFill>
                 <a:latin typeface="Arial"/>
               </a:rPr>
-              <a:t>Une marque leader dans les conversations</a:t>
+              <a:t>Les trajets vers Paris cliquent le mieux</a:t>
             </a:r>
           </a:p>
         </p:txBody>
@@ -7163,7 +7128,7 @@
                 </a:solidFill>
                 <a:latin typeface="Arial"/>
               </a:rPr>
-              <a:t>La SNCF domine avec 56,4 % de part de voix et 61,8 % des recommandations spontanées des IA, loin devant easyJet et Air France.</a:t>
+              <a:t>Les trajets Lille – Paris, Marseille – Paris et Lyon – Paris atteignent plus de 1,3 fois le CTR moyen.</a:t>
             </a:r>
           </a:p>
         </p:txBody>
@@ -7198,7 +7163,7 @@
                 </a:solidFill>
                 <a:latin typeface="Arial"/>
               </a:rPr>
-              <a:t>→  Capitaliser sur cette position pour orienter les voyageurs vers SNCF Connect.</a:t>
+              <a:t>→  Mettre en avant les trajets retour vers Paris.</a:t>
             </a:r>
           </a:p>
         </p:txBody>
@@ -7314,7 +7279,7 @@
                 </a:solidFill>
                 <a:latin typeface="Arial"/>
               </a:rPr>
-              <a:t>Une part de voix qui recule</a:t>
+              <a:t>Revoir Paris – Rennes</a:t>
             </a:r>
           </a:p>
         </p:txBody>
@@ -7349,7 +7314,7 @@
                 </a:solidFill>
                 <a:latin typeface="Arial"/>
               </a:rPr>
-              <a:t>La part de voix baisse de 27,7 pts et la recommandation spontanée de 4,4 pts sur le mois. La part de voix ads reste sous 0,1 %, la campagne ayant démarré le 30/09.</a:t>
+              <a:t>Paris – Rennes représente 23 % de la diffusion mais reste à 0,54 fois la moyenne.</a:t>
             </a:r>
           </a:p>
         </p:txBody>
@@ -7384,7 +7349,7 @@
                 </a:solidFill>
                 <a:latin typeface="Arial"/>
               </a:rPr>
-              <a:t>→  Suivre l'effet de la campagne sur la part de voix dès octobre.</a:t>
+              <a:t>→  Rééquilibrer la diffusion vers les liaisons qui cliquent le plus (Lyon, Toulouse, Lille).</a:t>
             </a:r>
           </a:p>
         </p:txBody>
@@ -7500,7 +7465,7 @@
                 </a:solidFill>
                 <a:latin typeface="Arial"/>
               </a:rPr>
-              <a:t>Les vacances, unique déclencheur</a:t>
+              <a:t>Les liaisons internationales intéressent</a:t>
             </a:r>
           </a:p>
         </p:txBody>
@@ -7535,7 +7500,7 @@
                 </a:solidFill>
                 <a:latin typeface="Arial"/>
               </a:rPr>
-              <a:t>100 % des conversations du secteur sont déclenchées par un départ en vacances.</a:t>
+              <a:t>Paris – Barcelone (1,17 fois) et Paris – Amsterdam (1,10 fois) dépassent la moyenne.</a:t>
             </a:r>
           </a:p>
         </p:txBody>
@@ -7570,7 +7535,7 @@
                 </a:solidFill>
                 <a:latin typeface="Arial"/>
               </a:rPr>
-              <a:t>→  Associer les trajets aux périodes de vacances : Toussaint, Noël, vacances d'hiver.</a:t>
+              <a:t>→  Tester davantage de liaisons internationales.</a:t>
             </a:r>
           </a:p>
         </p:txBody>
@@ -7721,7 +7686,7 @@
                 </a:solidFill>
                 <a:latin typeface="Arial"/>
               </a:rPr>
-              <a:t>La campagne a démarré le 30/09 : 139 036 impressions et 788 clics sur la journée, pour un CTR de 0,57 %.</a:t>
+              <a:t>Lancée le 30/09, la campagne génère 788 clics sur la journée, pour un CTR de 0,57 %.</a:t>
             </a:r>
           </a:p>
         </p:txBody>
@@ -7756,7 +7721,7 @@
                 </a:solidFill>
                 <a:latin typeface="Arial"/>
               </a:rPr>
-              <a:t>→  Premier bilan complet à faire sur le mois d'octobre.</a:t>
+              <a:t>→  Premier bilan complet sur le mois d'octobre.</a:t>
             </a:r>
           </a:p>
         </p:txBody>
